--- a/docs/Milestone/Showcase_Poster.pptx
+++ b/docs/Milestone/Showcase_Poster.pptx
@@ -249,28 +249,28 @@
                 <c:formatCode>General</c:formatCode>
                 <c:ptCount val="8"/>
                 <c:pt idx="0">
-                  <c:v>2</c:v>
+                  <c:v>2.0</c:v>
                 </c:pt>
                 <c:pt idx="1">
+                  <c:v>8.0</c:v>
+                </c:pt>
+                <c:pt idx="2">
+                  <c:v>4.0</c:v>
+                </c:pt>
+                <c:pt idx="3">
+                  <c:v>2.0</c:v>
+                </c:pt>
+                <c:pt idx="4">
+                  <c:v>2.0</c:v>
+                </c:pt>
+                <c:pt idx="5">
                   <c:v>8</c:v>
                 </c:pt>
-                <c:pt idx="2">
-                  <c:v>4</c:v>
-                </c:pt>
-                <c:pt idx="3">
-                  <c:v>2</c:v>
-                </c:pt>
-                <c:pt idx="4">
-                  <c:v>2</c:v>
-                </c:pt>
-                <c:pt idx="5">
-                  <c:v>6</c:v>
-                </c:pt>
                 <c:pt idx="6">
-                  <c:v>7</c:v>
+                  <c:v>7.0</c:v>
                 </c:pt>
                 <c:pt idx="7">
-                  <c:v>6</c:v>
+                  <c:v>10</c:v>
                 </c:pt>
               </c:numCache>
             </c:numRef>
@@ -347,7 +347,7 @@
         <c:axId val="-2113994440"/>
         <c:scaling>
           <c:orientation val="minMax"/>
-          <c:max val="9.5"/>
+          <c:max val="11.5"/>
           <c:min val="0"/>
         </c:scaling>
         <c:delete val="1"/>
@@ -4984,7 +4984,7 @@
                 </a:solidFill>
                 <a:latin typeface="Calibri"/>
               </a:rPr>
-              <a:t>37 test cases</a:t>
+              <a:t>43 test cases</a:t>
             </a:r>
           </a:p>
         </p:txBody>
@@ -6902,7 +6902,7 @@
                 </a:solidFill>
                 <a:latin typeface="Calibri"/>
               </a:rPr>
-              <a:t>37 / 37</a:t>
+              <a:t>43 / 43</a:t>
             </a:r>
           </a:p>
         </p:txBody>
